--- a/docs/source/images/Computation-Diagram.pptx
+++ b/docs/source/images/Computation-Diagram.pptx
@@ -2994,10 +2994,9 @@
             <a:avLst/>
           </a:prstGeom>
           <a:solidFill>
-            <a:schemeClr val="accent2">
-              <a:lumMod val="20000"/>
-              <a:lumOff val="80000"/>
-            </a:schemeClr>
+            <a:srgbClr val="97B6B1">
+              <a:alpha val="49804"/>
+            </a:srgbClr>
           </a:solidFill>
           <a:ln>
             <a:solidFill>
@@ -3054,10 +3053,9 @@
             <a:avLst/>
           </a:prstGeom>
           <a:solidFill>
-            <a:schemeClr val="tx2">
-              <a:lumMod val="10000"/>
-              <a:lumOff val="90000"/>
-            </a:schemeClr>
+            <a:srgbClr val="507F9F">
+              <a:alpha val="50196"/>
+            </a:srgbClr>
           </a:solidFill>
         </p:spPr>
         <p:style>
@@ -3099,7 +3097,7 @@
         </p:nvSpPr>
         <p:spPr>
           <a:xfrm>
-            <a:off x="11970605" y="8352921"/>
+            <a:off x="11970605" y="8864985"/>
             <a:ext cx="3172910" cy="1339481"/>
           </a:xfrm>
           <a:prstGeom prst="rect">
@@ -3246,7 +3244,7 @@
         <p:spPr>
           <a:xfrm>
             <a:off x="13384372" y="3642431"/>
-            <a:ext cx="172688" cy="4710490"/>
+            <a:ext cx="172688" cy="5222554"/>
           </a:xfrm>
           <a:prstGeom prst="straightConnector1">
             <a:avLst/>
@@ -3290,7 +3288,7 @@
         </p:nvSpPr>
         <p:spPr>
           <a:xfrm>
-            <a:off x="11923045" y="10121384"/>
+            <a:off x="11923045" y="10633448"/>
             <a:ext cx="3280939" cy="1634935"/>
           </a:xfrm>
           <a:prstGeom prst="rect">
@@ -3452,10 +3450,9 @@
             <a:avLst/>
           </a:prstGeom>
           <a:solidFill>
-            <a:schemeClr val="accent5">
-              <a:lumMod val="20000"/>
-              <a:lumOff val="80000"/>
-            </a:schemeClr>
+            <a:srgbClr val="D5734A">
+              <a:alpha val="23922"/>
+            </a:srgbClr>
           </a:solidFill>
           <a:ln>
             <a:solidFill>
@@ -3581,10 +3578,9 @@
               <a:avLst/>
             </a:prstGeom>
             <a:solidFill>
-              <a:schemeClr val="tx2">
-                <a:lumMod val="10000"/>
-                <a:lumOff val="90000"/>
-              </a:schemeClr>
+              <a:srgbClr val="507F9F">
+                <a:alpha val="50980"/>
+              </a:srgbClr>
             </a:solidFill>
           </p:spPr>
           <p:style>
@@ -4175,7 +4171,7 @@
                   </a:effectLst>
                   <a:latin typeface="Montserrat" pitchFamily="2" charset="77"/>
                 </a:rPr>
-                <a:t>K-coefficient opacities (Marley et al. 2020)</a:t>
+                <a:t>K-coefficient opacities (Marley et al. 2021)</a:t>
               </a:r>
             </a:p>
             <a:p>
